--- a/docs/1 практика/Гамов_Презентация Отчет НИР_26.pptx
+++ b/docs/1 практика/Гамов_Презентация Отчет НИР_26.pptx
@@ -6,20 +6,21 @@
     <p:sldMasterId id="2147483652" r:id="rId2"/>
   </p:sldMasterIdLst>
   <p:notesMasterIdLst>
-    <p:notesMasterId r:id="rId14"/>
+    <p:notesMasterId r:id="rId15"/>
   </p:notesMasterIdLst>
   <p:sldIdLst>
     <p:sldId id="256" r:id="rId3"/>
-    <p:sldId id="257" r:id="rId4"/>
-    <p:sldId id="258" r:id="rId5"/>
-    <p:sldId id="259" r:id="rId6"/>
-    <p:sldId id="260" r:id="rId7"/>
-    <p:sldId id="261" r:id="rId8"/>
-    <p:sldId id="262" r:id="rId9"/>
-    <p:sldId id="263" r:id="rId10"/>
-    <p:sldId id="264" r:id="rId11"/>
-    <p:sldId id="265" r:id="rId12"/>
-    <p:sldId id="266" r:id="rId13"/>
+    <p:sldId id="267" r:id="rId4"/>
+    <p:sldId id="257" r:id="rId5"/>
+    <p:sldId id="258" r:id="rId6"/>
+    <p:sldId id="259" r:id="rId7"/>
+    <p:sldId id="260" r:id="rId8"/>
+    <p:sldId id="261" r:id="rId9"/>
+    <p:sldId id="262" r:id="rId10"/>
+    <p:sldId id="263" r:id="rId11"/>
+    <p:sldId id="264" r:id="rId12"/>
+    <p:sldId id="265" r:id="rId13"/>
+    <p:sldId id="266" r:id="rId14"/>
   </p:sldIdLst>
   <p:sldSz cx="10080625" cy="5670550"/>
   <p:notesSz cx="7559675" cy="10691813"/>
@@ -988,8 +989,8 @@
         </p:nvSpPr>
         <p:spPr>
           <a:xfrm>
-            <a:off x="573120" y="1336680"/>
-            <a:ext cx="6413040" cy="3607920"/>
+            <a:off x="573088" y="1336675"/>
+            <a:ext cx="6413500" cy="3608388"/>
           </a:xfrm>
           <a:prstGeom prst="rect">
             <a:avLst/>
@@ -1115,6 +1116,198 @@
         </p:txBody>
       </p:sp>
     </p:spTree>
+  </p:cSld>
+  <p:clrMapOvr>
+    <a:masterClrMapping/>
+  </p:clrMapOvr>
+</p:notes>
+</file>
+
+<file path=ppt/notesSlides/notesSlide2.xml><?xml version="1.0" encoding="utf-8"?>
+<p:notes xmlns:a="http://schemas.openxmlformats.org/drawingml/2006/main" xmlns:r="http://schemas.openxmlformats.org/officeDocument/2006/relationships" xmlns:p="http://schemas.openxmlformats.org/presentationml/2006/main">
+  <p:cSld>
+    <p:spTree>
+      <p:nvGrpSpPr>
+        <p:cNvPr id="1" name="">
+          <a:extLst>
+            <a:ext uri="{FF2B5EF4-FFF2-40B4-BE49-F238E27FC236}">
+              <a16:creationId xmlns:a16="http://schemas.microsoft.com/office/drawing/2014/main" id="{424BD987-5CF3-1A8B-24A1-5AA8DB65A135}"/>
+            </a:ext>
+          </a:extLst>
+        </p:cNvPr>
+        <p:cNvGrpSpPr/>
+        <p:nvPr/>
+      </p:nvGrpSpPr>
+      <p:grpSpPr>
+        <a:xfrm>
+          <a:off x="0" y="0"/>
+          <a:ext cx="0" cy="0"/>
+          <a:chOff x="0" y="0"/>
+          <a:chExt cx="0" cy="0"/>
+        </a:xfrm>
+      </p:grpSpPr>
+      <p:sp>
+        <p:nvSpPr>
+          <p:cNvPr id="99" name="PlaceHolder 1">
+            <a:extLst>
+              <a:ext uri="{FF2B5EF4-FFF2-40B4-BE49-F238E27FC236}">
+                <a16:creationId xmlns:a16="http://schemas.microsoft.com/office/drawing/2014/main" id="{90181FB9-3E92-069A-240C-4E39FF69D757}"/>
+              </a:ext>
+            </a:extLst>
+          </p:cNvPr>
+          <p:cNvSpPr>
+            <a:spLocks noGrp="1" noRot="1" noChangeAspect="1"/>
+          </p:cNvSpPr>
+          <p:nvPr>
+            <p:ph type="sldImg"/>
+          </p:nvPr>
+        </p:nvSpPr>
+        <p:spPr>
+          <a:xfrm>
+            <a:off x="573088" y="1336675"/>
+            <a:ext cx="6413500" cy="3608388"/>
+          </a:xfrm>
+          <a:prstGeom prst="rect">
+            <a:avLst/>
+          </a:prstGeom>
+          <a:ln w="0">
+            <a:noFill/>
+          </a:ln>
+        </p:spPr>
+      </p:sp>
+      <p:sp>
+        <p:nvSpPr>
+          <p:cNvPr id="100" name="PlaceHolder 2">
+            <a:extLst>
+              <a:ext uri="{FF2B5EF4-FFF2-40B4-BE49-F238E27FC236}">
+                <a16:creationId xmlns:a16="http://schemas.microsoft.com/office/drawing/2014/main" id="{A790455F-8DD8-581A-80A2-440F61189536}"/>
+              </a:ext>
+            </a:extLst>
+          </p:cNvPr>
+          <p:cNvSpPr>
+            <a:spLocks noGrp="1"/>
+          </p:cNvSpPr>
+          <p:nvPr>
+            <p:ph type="body"/>
+          </p:nvPr>
+        </p:nvSpPr>
+        <p:spPr>
+          <a:xfrm>
+            <a:off x="755640" y="5145120"/>
+            <a:ext cx="6048000" cy="4209840"/>
+          </a:xfrm>
+          <a:prstGeom prst="rect">
+            <a:avLst/>
+          </a:prstGeom>
+          <a:noFill/>
+          <a:ln w="0">
+            <a:noFill/>
+          </a:ln>
+        </p:spPr>
+        <p:txBody>
+          <a:bodyPr lIns="91440" tIns="45720" rIns="91440" bIns="45720" anchor="t">
+            <a:noAutofit/>
+          </a:bodyPr>
+          <a:lstStyle/>
+          <a:p>
+            <a:pPr indent="0">
+              <a:buNone/>
+            </a:pPr>
+            <a:endParaRPr lang="ru-RU" sz="1800" b="0" u="none" strike="noStrike">
+              <a:solidFill>
+                <a:srgbClr val="000000"/>
+              </a:solidFill>
+              <a:effectLst/>
+              <a:uFillTx/>
+              <a:latin typeface="Arial"/>
+            </a:endParaRPr>
+          </a:p>
+        </p:txBody>
+      </p:sp>
+      <p:sp>
+        <p:nvSpPr>
+          <p:cNvPr id="101" name="PlaceHolder 3">
+            <a:extLst>
+              <a:ext uri="{FF2B5EF4-FFF2-40B4-BE49-F238E27FC236}">
+                <a16:creationId xmlns:a16="http://schemas.microsoft.com/office/drawing/2014/main" id="{62725BC2-4737-9D8B-43CD-47527FA8FF0E}"/>
+              </a:ext>
+            </a:extLst>
+          </p:cNvPr>
+          <p:cNvSpPr>
+            <a:spLocks noGrp="1"/>
+          </p:cNvSpPr>
+          <p:nvPr>
+            <p:ph type="sldNum" idx="16"/>
+          </p:nvPr>
+        </p:nvSpPr>
+        <p:spPr>
+          <a:xfrm>
+            <a:off x="4281480" y="10155240"/>
+            <a:ext cx="3276360" cy="536040"/>
+          </a:xfrm>
+          <a:prstGeom prst="rect">
+            <a:avLst/>
+          </a:prstGeom>
+          <a:noFill/>
+          <a:ln w="0">
+            <a:noFill/>
+          </a:ln>
+        </p:spPr>
+        <p:txBody>
+          <a:bodyPr lIns="91440" tIns="45720" rIns="91440" bIns="45720" anchor="b">
+            <a:noAutofit/>
+          </a:bodyPr>
+          <a:lstStyle>
+            <a:lvl1pPr indent="0" algn="r">
+              <a:lnSpc>
+                <a:spcPct val="100000"/>
+              </a:lnSpc>
+              <a:buNone/>
+              <a:defRPr lang="ru-RU" sz="1200" b="0" u="none" strike="noStrike">
+                <a:solidFill>
+                  <a:srgbClr val="000000"/>
+                </a:solidFill>
+                <a:effectLst/>
+                <a:uFillTx/>
+                <a:latin typeface="Times New Roman"/>
+              </a:defRPr>
+            </a:lvl1pPr>
+          </a:lstStyle>
+          <a:p>
+            <a:pPr indent="0" algn="r">
+              <a:lnSpc>
+                <a:spcPct val="100000"/>
+              </a:lnSpc>
+              <a:buNone/>
+            </a:pPr>
+            <a:fld id="{FBF72EE2-1C9D-45EB-9423-BA8CE5A70DBA}" type="slidenum">
+              <a:rPr lang="ru-RU" sz="1200" b="0" u="none" strike="noStrike">
+                <a:solidFill>
+                  <a:srgbClr val="000000"/>
+                </a:solidFill>
+                <a:effectLst/>
+                <a:uFillTx/>
+                <a:latin typeface="Times New Roman"/>
+              </a:rPr>
+              <a:t>2</a:t>
+            </a:fld>
+            <a:endParaRPr lang="ru-RU" sz="1200" b="0" u="none" strike="noStrike">
+              <a:solidFill>
+                <a:srgbClr val="000000"/>
+              </a:solidFill>
+              <a:effectLst/>
+              <a:uFillTx/>
+              <a:latin typeface="Times New Roman"/>
+            </a:endParaRPr>
+          </a:p>
+        </p:txBody>
+      </p:sp>
+    </p:spTree>
+    <p:extLst>
+      <p:ext uri="{BB962C8B-B14F-4D97-AF65-F5344CB8AC3E}">
+        <p14:creationId xmlns:p14="http://schemas.microsoft.com/office/powerpoint/2010/main" val="3773623911"/>
+      </p:ext>
+    </p:extLst>
   </p:cSld>
   <p:clrMapOvr>
     <a:masterClrMapping/>
@@ -4495,6 +4688,53 @@
           </a:p>
         </p:txBody>
       </p:sp>
+      <p:pic>
+        <p:nvPicPr>
+          <p:cNvPr id="1026" name="Picture 2" descr="Поступающему">
+            <a:extLst>
+              <a:ext uri="{FF2B5EF4-FFF2-40B4-BE49-F238E27FC236}">
+                <a16:creationId xmlns:a16="http://schemas.microsoft.com/office/drawing/2014/main" id="{D8512673-8B44-6DD9-C323-E5904839D0C4}"/>
+              </a:ext>
+            </a:extLst>
+          </p:cNvPr>
+          <p:cNvPicPr>
+            <a:picLocks noChangeAspect="1" noChangeArrowheads="1"/>
+          </p:cNvPicPr>
+          <p:nvPr/>
+        </p:nvPicPr>
+        <p:blipFill>
+          <a:blip r:embed="rId4" cstate="print">
+            <a:extLst>
+              <a:ext uri="{28A0092B-C50C-407E-A947-70E740481C1C}">
+                <a14:useLocalDpi xmlns:a14="http://schemas.microsoft.com/office/drawing/2010/main" val="0"/>
+              </a:ext>
+            </a:extLst>
+          </a:blip>
+          <a:srcRect/>
+          <a:stretch>
+            <a:fillRect/>
+          </a:stretch>
+        </p:blipFill>
+        <p:spPr bwMode="auto">
+          <a:xfrm>
+            <a:off x="7167635" y="30255"/>
+            <a:ext cx="463570" cy="463570"/>
+          </a:xfrm>
+          <a:prstGeom prst="rect">
+            <a:avLst/>
+          </a:prstGeom>
+          <a:noFill/>
+          <a:extLst>
+            <a:ext uri="{909E8E84-426E-40DD-AFC4-6F175D3DCCD1}">
+              <a14:hiddenFill xmlns:a14="http://schemas.microsoft.com/office/drawing/2010/main">
+                <a:solidFill>
+                  <a:srgbClr val="FFFFFF"/>
+                </a:solidFill>
+              </a14:hiddenFill>
+            </a:ext>
+          </a:extLst>
+        </p:spPr>
+      </p:pic>
     </p:spTree>
   </p:cSld>
   <p:clrMapOvr>
@@ -4504,6 +4744,47 @@
 </file>
 
 <file path=ppt/slides/slide10.xml><?xml version="1.0" encoding="utf-8"?>
+<p:sld xmlns:a="http://schemas.openxmlformats.org/drawingml/2006/main" xmlns:r="http://schemas.openxmlformats.org/officeDocument/2006/relationships" xmlns:p="http://schemas.openxmlformats.org/presentationml/2006/main">
+  <p:cSld>
+    <p:spTree>
+      <p:nvGrpSpPr>
+        <p:cNvPr id="1" name=""/>
+        <p:cNvGrpSpPr/>
+        <p:nvPr/>
+      </p:nvGrpSpPr>
+      <p:grpSpPr>
+        <a:xfrm>
+          <a:off x="0" y="0"/>
+          <a:ext cx="0" cy="0"/>
+          <a:chOff x="0" y="0"/>
+          <a:chExt cx="0" cy="0"/>
+        </a:xfrm>
+      </p:grpSpPr>
+      <p:graphicFrame>
+        <p:nvGraphicFramePr>
+          <p:cNvPr id="72" name="Диаграмма 3"/>
+          <p:cNvGraphicFramePr/>
+          <p:nvPr/>
+        </p:nvGraphicFramePr>
+        <p:xfrm>
+          <a:off x="575640" y="165240"/>
+          <a:ext cx="8910720" cy="5113080"/>
+        </p:xfrm>
+        <a:graphic>
+          <a:graphicData uri="http://schemas.openxmlformats.org/drawingml/2006/chart">
+            <c:chart xmlns:c="http://schemas.openxmlformats.org/drawingml/2006/chart" xmlns:r="http://schemas.openxmlformats.org/officeDocument/2006/relationships" r:id="rId2"/>
+          </a:graphicData>
+        </a:graphic>
+      </p:graphicFrame>
+    </p:spTree>
+  </p:cSld>
+  <p:clrMapOvr>
+    <a:masterClrMapping/>
+  </p:clrMapOvr>
+</p:sld>
+</file>
+
+<file path=ppt/slides/slide11.xml><?xml version="1.0" encoding="utf-8"?>
 <p:sld xmlns:a="http://schemas.openxmlformats.org/drawingml/2006/main" xmlns:r="http://schemas.openxmlformats.org/officeDocument/2006/relationships" xmlns:p="http://schemas.openxmlformats.org/presentationml/2006/main">
   <p:cSld>
     <p:spTree>
@@ -4949,7 +5230,7 @@
 </p:sld>
 </file>
 
-<file path=ppt/slides/slide11.xml><?xml version="1.0" encoding="utf-8"?>
+<file path=ppt/slides/slide12.xml><?xml version="1.0" encoding="utf-8"?>
 <p:sld xmlns:a="http://schemas.openxmlformats.org/drawingml/2006/main" xmlns:r="http://schemas.openxmlformats.org/officeDocument/2006/relationships" xmlns:p="http://schemas.openxmlformats.org/presentationml/2006/main">
   <p:cSld>
     <p:spTree>
@@ -5338,6 +5619,337 @@
 <file path=ppt/slides/slide2.xml><?xml version="1.0" encoding="utf-8"?>
 <p:sld xmlns:a="http://schemas.openxmlformats.org/drawingml/2006/main" xmlns:r="http://schemas.openxmlformats.org/officeDocument/2006/relationships" xmlns:p="http://schemas.openxmlformats.org/presentationml/2006/main">
   <p:cSld>
+    <p:bg>
+      <p:bgPr>
+        <a:blipFill rotWithShape="0">
+          <a:blip r:embed="rId3"/>
+          <a:stretch/>
+        </a:blipFill>
+        <a:effectLst/>
+      </p:bgPr>
+    </p:bg>
+    <p:spTree>
+      <p:nvGrpSpPr>
+        <p:cNvPr id="1" name="">
+          <a:extLst>
+            <a:ext uri="{FF2B5EF4-FFF2-40B4-BE49-F238E27FC236}">
+              <a16:creationId xmlns:a16="http://schemas.microsoft.com/office/drawing/2014/main" id="{99FBABD4-D544-2B1B-8211-4F56D70DB88C}"/>
+            </a:ext>
+          </a:extLst>
+        </p:cNvPr>
+        <p:cNvGrpSpPr/>
+        <p:nvPr/>
+      </p:nvGrpSpPr>
+      <p:grpSpPr>
+        <a:xfrm>
+          <a:off x="0" y="0"/>
+          <a:ext cx="0" cy="0"/>
+          <a:chOff x="0" y="0"/>
+          <a:chExt cx="0" cy="0"/>
+        </a:xfrm>
+      </p:grpSpPr>
+      <p:sp>
+        <p:nvSpPr>
+          <p:cNvPr id="28" name="TextBox 6">
+            <a:extLst>
+              <a:ext uri="{FF2B5EF4-FFF2-40B4-BE49-F238E27FC236}">
+                <a16:creationId xmlns:a16="http://schemas.microsoft.com/office/drawing/2014/main" id="{4E524F40-2DE2-7B8D-693B-720A3E0A24AF}"/>
+              </a:ext>
+            </a:extLst>
+          </p:cNvPr>
+          <p:cNvSpPr/>
+          <p:nvPr/>
+        </p:nvSpPr>
+        <p:spPr>
+          <a:xfrm>
+            <a:off x="360000" y="2020320"/>
+            <a:ext cx="4527000" cy="1186920"/>
+          </a:xfrm>
+          <a:prstGeom prst="rect">
+            <a:avLst/>
+          </a:prstGeom>
+          <a:noFill/>
+          <a:ln w="0">
+            <a:noFill/>
+          </a:ln>
+        </p:spPr>
+        <p:style>
+          <a:lnRef idx="0">
+            <a:scrgbClr r="0" g="0" b="0"/>
+          </a:lnRef>
+          <a:fillRef idx="0">
+            <a:scrgbClr r="0" g="0" b="0"/>
+          </a:fillRef>
+          <a:effectRef idx="0">
+            <a:scrgbClr r="0" g="0" b="0"/>
+          </a:effectRef>
+          <a:fontRef idx="minor"/>
+        </p:style>
+        <p:txBody>
+          <a:bodyPr lIns="90000" tIns="45000" rIns="90000" bIns="45000" anchor="t">
+            <a:spAutoFit/>
+          </a:bodyPr>
+          <a:lstStyle/>
+          <a:p>
+            <a:pPr defTabSz="914400">
+              <a:lnSpc>
+                <a:spcPct val="100000"/>
+              </a:lnSpc>
+            </a:pPr>
+            <a:r>
+              <a:rPr lang="ru-RU" sz="2400" b="1" u="none" strike="noStrike">
+                <a:solidFill>
+                  <a:schemeClr val="accent5">
+                    <a:lumMod val="75000"/>
+                  </a:schemeClr>
+                </a:solidFill>
+                <a:effectLst/>
+                <a:uFillTx/>
+                <a:latin typeface="Times New Roman"/>
+                <a:ea typeface="Tahoma"/>
+              </a:rPr>
+              <a:t>Изучение использования элементов геймификации в неигровом контенте</a:t>
+            </a:r>
+            <a:endParaRPr lang="ru-RU" sz="2400" b="0" u="none" strike="noStrike">
+              <a:solidFill>
+                <a:srgbClr val="000000"/>
+              </a:solidFill>
+              <a:effectLst/>
+              <a:uFillTx/>
+              <a:latin typeface="Arial"/>
+            </a:endParaRPr>
+          </a:p>
+        </p:txBody>
+      </p:sp>
+      <p:sp>
+        <p:nvSpPr>
+          <p:cNvPr id="29" name="TextBox 22">
+            <a:extLst>
+              <a:ext uri="{FF2B5EF4-FFF2-40B4-BE49-F238E27FC236}">
+                <a16:creationId xmlns:a16="http://schemas.microsoft.com/office/drawing/2014/main" id="{01CE154F-3BB7-272B-94AE-80479EFA8D9A}"/>
+              </a:ext>
+            </a:extLst>
+          </p:cNvPr>
+          <p:cNvSpPr/>
+          <p:nvPr/>
+        </p:nvSpPr>
+        <p:spPr>
+          <a:xfrm>
+            <a:off x="360000" y="4465800"/>
+            <a:ext cx="4266720" cy="398160"/>
+          </a:xfrm>
+          <a:prstGeom prst="rect">
+            <a:avLst/>
+          </a:prstGeom>
+          <a:noFill/>
+          <a:ln w="0">
+            <a:noFill/>
+          </a:ln>
+        </p:spPr>
+        <p:style>
+          <a:lnRef idx="0">
+            <a:scrgbClr r="0" g="0" b="0"/>
+          </a:lnRef>
+          <a:fillRef idx="0">
+            <a:scrgbClr r="0" g="0" b="0"/>
+          </a:fillRef>
+          <a:effectRef idx="0">
+            <a:scrgbClr r="0" g="0" b="0"/>
+          </a:effectRef>
+          <a:fontRef idx="minor"/>
+        </p:style>
+        <p:txBody>
+          <a:bodyPr lIns="90000" tIns="45000" rIns="90000" bIns="45000" anchor="t">
+            <a:spAutoFit/>
+          </a:bodyPr>
+          <a:lstStyle/>
+          <a:p>
+            <a:pPr defTabSz="914400">
+              <a:lnSpc>
+                <a:spcPct val="100000"/>
+              </a:lnSpc>
+            </a:pPr>
+            <a:r>
+              <a:rPr lang="ru-RU" sz="1000" b="0" u="none" strike="noStrike">
+                <a:solidFill>
+                  <a:srgbClr val="000000"/>
+                </a:solidFill>
+                <a:effectLst/>
+                <a:uFillTx/>
+                <a:latin typeface="Times New Roman"/>
+              </a:rPr>
+              <a:t>Отчет о производственной практике: </a:t>
+            </a:r>
+            <a:endParaRPr lang="ru-RU" sz="1000" b="0" u="none" strike="noStrike">
+              <a:solidFill>
+                <a:srgbClr val="000000"/>
+              </a:solidFill>
+              <a:effectLst/>
+              <a:uFillTx/>
+              <a:latin typeface="Arial"/>
+            </a:endParaRPr>
+          </a:p>
+          <a:p>
+            <a:pPr defTabSz="914400">
+              <a:lnSpc>
+                <a:spcPct val="100000"/>
+              </a:lnSpc>
+            </a:pPr>
+            <a:r>
+              <a:rPr lang="ru-RU" sz="1000" b="0" u="none" strike="noStrike">
+                <a:solidFill>
+                  <a:srgbClr val="000000"/>
+                </a:solidFill>
+                <a:effectLst/>
+                <a:uFillTx/>
+                <a:latin typeface="Times New Roman"/>
+              </a:rPr>
+              <a:t>Гамов Павел Антонович ЭМС-271</a:t>
+            </a:r>
+            <a:endParaRPr lang="ru-RU" sz="1000" b="0" u="none" strike="noStrike">
+              <a:solidFill>
+                <a:srgbClr val="000000"/>
+              </a:solidFill>
+              <a:effectLst/>
+              <a:uFillTx/>
+              <a:latin typeface="Arial"/>
+            </a:endParaRPr>
+          </a:p>
+        </p:txBody>
+      </p:sp>
+      <p:sp>
+        <p:nvSpPr>
+          <p:cNvPr id="30" name="TextBox 23">
+            <a:extLst>
+              <a:ext uri="{FF2B5EF4-FFF2-40B4-BE49-F238E27FC236}">
+                <a16:creationId xmlns:a16="http://schemas.microsoft.com/office/drawing/2014/main" id="{DD2C8D77-9392-2605-7EF7-AD74AF935DD6}"/>
+              </a:ext>
+            </a:extLst>
+          </p:cNvPr>
+          <p:cNvSpPr/>
+          <p:nvPr/>
+        </p:nvSpPr>
+        <p:spPr>
+          <a:xfrm>
+            <a:off x="360000" y="4864320"/>
+            <a:ext cx="4266720" cy="244440"/>
+          </a:xfrm>
+          <a:prstGeom prst="rect">
+            <a:avLst/>
+          </a:prstGeom>
+          <a:noFill/>
+          <a:ln w="0">
+            <a:noFill/>
+          </a:ln>
+        </p:spPr>
+        <p:style>
+          <a:lnRef idx="0">
+            <a:scrgbClr r="0" g="0" b="0"/>
+          </a:lnRef>
+          <a:fillRef idx="0">
+            <a:scrgbClr r="0" g="0" b="0"/>
+          </a:fillRef>
+          <a:effectRef idx="0">
+            <a:scrgbClr r="0" g="0" b="0"/>
+          </a:effectRef>
+          <a:fontRef idx="minor"/>
+        </p:style>
+        <p:txBody>
+          <a:bodyPr lIns="90000" tIns="45000" rIns="90000" bIns="45000" anchor="t">
+            <a:spAutoFit/>
+          </a:bodyPr>
+          <a:lstStyle/>
+          <a:p>
+            <a:pPr defTabSz="914400">
+              <a:lnSpc>
+                <a:spcPct val="100000"/>
+              </a:lnSpc>
+            </a:pPr>
+            <a:r>
+              <a:rPr lang="ru-RU" sz="1000" b="0" u="none" strike="noStrike">
+                <a:solidFill>
+                  <a:srgbClr val="000000"/>
+                </a:solidFill>
+                <a:effectLst/>
+                <a:uFillTx/>
+                <a:latin typeface="Times New Roman"/>
+              </a:rPr>
+              <a:t>Москва 2026</a:t>
+            </a:r>
+            <a:endParaRPr lang="ru-RU" sz="1000" b="0" u="none" strike="noStrike">
+              <a:solidFill>
+                <a:srgbClr val="000000"/>
+              </a:solidFill>
+              <a:effectLst/>
+              <a:uFillTx/>
+              <a:latin typeface="Arial"/>
+            </a:endParaRPr>
+          </a:p>
+        </p:txBody>
+      </p:sp>
+      <p:pic>
+        <p:nvPicPr>
+          <p:cNvPr id="1026" name="Picture 2" descr="Поступающему">
+            <a:extLst>
+              <a:ext uri="{FF2B5EF4-FFF2-40B4-BE49-F238E27FC236}">
+                <a16:creationId xmlns:a16="http://schemas.microsoft.com/office/drawing/2014/main" id="{E5C46265-1689-F7CC-787D-A08311ABCC54}"/>
+              </a:ext>
+            </a:extLst>
+          </p:cNvPr>
+          <p:cNvPicPr>
+            <a:picLocks noChangeAspect="1" noChangeArrowheads="1"/>
+          </p:cNvPicPr>
+          <p:nvPr/>
+        </p:nvPicPr>
+        <p:blipFill>
+          <a:blip r:embed="rId4" cstate="print">
+            <a:extLst>
+              <a:ext uri="{28A0092B-C50C-407E-A947-70E740481C1C}">
+                <a14:useLocalDpi xmlns:a14="http://schemas.microsoft.com/office/drawing/2010/main" val="0"/>
+              </a:ext>
+            </a:extLst>
+          </a:blip>
+          <a:srcRect/>
+          <a:stretch>
+            <a:fillRect/>
+          </a:stretch>
+        </p:blipFill>
+        <p:spPr bwMode="auto">
+          <a:xfrm>
+            <a:off x="7167635" y="30255"/>
+            <a:ext cx="463570" cy="463570"/>
+          </a:xfrm>
+          <a:prstGeom prst="rect">
+            <a:avLst/>
+          </a:prstGeom>
+          <a:noFill/>
+          <a:extLst>
+            <a:ext uri="{909E8E84-426E-40DD-AFC4-6F175D3DCCD1}">
+              <a14:hiddenFill xmlns:a14="http://schemas.microsoft.com/office/drawing/2010/main">
+                <a:solidFill>
+                  <a:srgbClr val="FFFFFF"/>
+                </a:solidFill>
+              </a14:hiddenFill>
+            </a:ext>
+          </a:extLst>
+        </p:spPr>
+      </p:pic>
+    </p:spTree>
+    <p:extLst>
+      <p:ext uri="{BB962C8B-B14F-4D97-AF65-F5344CB8AC3E}">
+        <p14:creationId xmlns:p14="http://schemas.microsoft.com/office/powerpoint/2010/main" val="2907362068"/>
+      </p:ext>
+    </p:extLst>
+  </p:cSld>
+  <p:clrMapOvr>
+    <a:masterClrMapping/>
+  </p:clrMapOvr>
+</p:sld>
+</file>
+
+<file path=ppt/slides/slide3.xml><?xml version="1.0" encoding="utf-8"?>
+<p:sld xmlns:a="http://schemas.openxmlformats.org/drawingml/2006/main" xmlns:r="http://schemas.openxmlformats.org/officeDocument/2006/relationships" xmlns:p="http://schemas.openxmlformats.org/presentationml/2006/main">
+  <p:cSld>
     <p:spTree>
       <p:nvGrpSpPr>
         <p:cNvPr id="1" name=""/>
@@ -5728,7 +6340,7 @@
 </p:sld>
 </file>
 
-<file path=ppt/slides/slide3.xml><?xml version="1.0" encoding="utf-8"?>
+<file path=ppt/slides/slide4.xml><?xml version="1.0" encoding="utf-8"?>
 <p:sld xmlns:a="http://schemas.openxmlformats.org/drawingml/2006/main" xmlns:r="http://schemas.openxmlformats.org/officeDocument/2006/relationships" xmlns:p="http://schemas.openxmlformats.org/presentationml/2006/main">
   <p:cSld>
     <p:spTree>
@@ -5837,7 +6449,7 @@
         </p:spPr>
         <p:txBody>
           <a:bodyPr lIns="0" tIns="0" rIns="0" bIns="0" anchor="t">
-            <a:normAutofit fontScale="92500" lnSpcReduction="9999"/>
+            <a:normAutofit fontScale="92500" lnSpcReduction="19999"/>
           </a:bodyPr>
           <a:lstStyle/>
           <a:p>
@@ -6055,7 +6667,7 @@
 </p:sld>
 </file>
 
-<file path=ppt/slides/slide4.xml><?xml version="1.0" encoding="utf-8"?>
+<file path=ppt/slides/slide5.xml><?xml version="1.0" encoding="utf-8"?>
 <p:sld xmlns:a="http://schemas.openxmlformats.org/drawingml/2006/main" xmlns:r="http://schemas.openxmlformats.org/officeDocument/2006/relationships" xmlns:p="http://schemas.openxmlformats.org/presentationml/2006/main">
   <p:cSld>
     <p:spTree>
@@ -6423,7 +7035,7 @@
 </p:sld>
 </file>
 
-<file path=ppt/slides/slide5.xml><?xml version="1.0" encoding="utf-8"?>
+<file path=ppt/slides/slide6.xml><?xml version="1.0" encoding="utf-8"?>
 <p:sld xmlns:a="http://schemas.openxmlformats.org/drawingml/2006/main" xmlns:r="http://schemas.openxmlformats.org/officeDocument/2006/relationships" xmlns:p="http://schemas.openxmlformats.org/presentationml/2006/main">
   <p:cSld>
     <p:spTree>
@@ -6821,7 +7433,7 @@
 </p:sld>
 </file>
 
-<file path=ppt/slides/slide6.xml><?xml version="1.0" encoding="utf-8"?>
+<file path=ppt/slides/slide7.xml><?xml version="1.0" encoding="utf-8"?>
 <p:sld xmlns:a="http://schemas.openxmlformats.org/drawingml/2006/main" xmlns:r="http://schemas.openxmlformats.org/officeDocument/2006/relationships" xmlns:p="http://schemas.openxmlformats.org/presentationml/2006/main">
   <p:cSld>
     <p:spTree>
@@ -7213,7 +7825,7 @@
 </p:sld>
 </file>
 
-<file path=ppt/slides/slide7.xml><?xml version="1.0" encoding="utf-8"?>
+<file path=ppt/slides/slide8.xml><?xml version="1.0" encoding="utf-8"?>
 <p:sld xmlns:a="http://schemas.openxmlformats.org/drawingml/2006/main" xmlns:r="http://schemas.openxmlformats.org/officeDocument/2006/relationships" xmlns:p="http://schemas.openxmlformats.org/presentationml/2006/main">
   <p:cSld>
     <p:spTree>
@@ -7724,7 +8336,7 @@
 </p:sld>
 </file>
 
-<file path=ppt/slides/slide8.xml><?xml version="1.0" encoding="utf-8"?>
+<file path=ppt/slides/slide9.xml><?xml version="1.0" encoding="utf-8"?>
 <p:sld xmlns:a="http://schemas.openxmlformats.org/drawingml/2006/main" xmlns:r="http://schemas.openxmlformats.org/officeDocument/2006/relationships" xmlns:p="http://schemas.openxmlformats.org/presentationml/2006/main">
   <p:cSld>
     <p:spTree>
@@ -8526,47 +9138,6 @@
           </a:ln>
         </p:spPr>
       </p:cxnSp>
-    </p:spTree>
-  </p:cSld>
-  <p:clrMapOvr>
-    <a:masterClrMapping/>
-  </p:clrMapOvr>
-</p:sld>
-</file>
-
-<file path=ppt/slides/slide9.xml><?xml version="1.0" encoding="utf-8"?>
-<p:sld xmlns:a="http://schemas.openxmlformats.org/drawingml/2006/main" xmlns:r="http://schemas.openxmlformats.org/officeDocument/2006/relationships" xmlns:p="http://schemas.openxmlformats.org/presentationml/2006/main">
-  <p:cSld>
-    <p:spTree>
-      <p:nvGrpSpPr>
-        <p:cNvPr id="1" name=""/>
-        <p:cNvGrpSpPr/>
-        <p:nvPr/>
-      </p:nvGrpSpPr>
-      <p:grpSpPr>
-        <a:xfrm>
-          <a:off x="0" y="0"/>
-          <a:ext cx="0" cy="0"/>
-          <a:chOff x="0" y="0"/>
-          <a:chExt cx="0" cy="0"/>
-        </a:xfrm>
-      </p:grpSpPr>
-      <p:graphicFrame>
-        <p:nvGraphicFramePr>
-          <p:cNvPr id="72" name="Диаграмма 3"/>
-          <p:cNvGraphicFramePr/>
-          <p:nvPr/>
-        </p:nvGraphicFramePr>
-        <p:xfrm>
-          <a:off x="575640" y="165240"/>
-          <a:ext cx="8910720" cy="5113080"/>
-        </p:xfrm>
-        <a:graphic>
-          <a:graphicData uri="http://schemas.openxmlformats.org/drawingml/2006/chart">
-            <c:chart xmlns:c="http://schemas.openxmlformats.org/drawingml/2006/chart" xmlns:r="http://schemas.openxmlformats.org/officeDocument/2006/relationships" r:id="rId2"/>
-          </a:graphicData>
-        </a:graphic>
-      </p:graphicFrame>
     </p:spTree>
   </p:cSld>
   <p:clrMapOvr>

--- a/docs/1 практика/Гамов_Презентация Отчет НИР_26.pptx
+++ b/docs/1 практика/Гамов_Презентация Отчет НИР_26.pptx
@@ -6,7 +6,7 @@
     <p:sldMasterId id="2147483652" r:id="rId2"/>
   </p:sldMasterIdLst>
   <p:notesMasterIdLst>
-    <p:notesMasterId r:id="rId15"/>
+    <p:notesMasterId r:id="rId14"/>
   </p:notesMasterIdLst>
   <p:sldIdLst>
     <p:sldId id="256" r:id="rId3"/>
@@ -20,7 +20,6 @@
     <p:sldId id="263" r:id="rId11"/>
     <p:sldId id="264" r:id="rId12"/>
     <p:sldId id="265" r:id="rId13"/>
-    <p:sldId id="266" r:id="rId14"/>
   </p:sldIdLst>
   <p:sldSz cx="10080625" cy="5670550"/>
   <p:notesSz cx="7559675" cy="10691813"/>
@@ -5222,392 +5221,6 @@
           </a:prstGeom>
         </p:spPr>
       </p:pic>
-    </p:spTree>
-  </p:cSld>
-  <p:clrMapOvr>
-    <a:masterClrMapping/>
-  </p:clrMapOvr>
-</p:sld>
-</file>
-
-<file path=ppt/slides/slide12.xml><?xml version="1.0" encoding="utf-8"?>
-<p:sld xmlns:a="http://schemas.openxmlformats.org/drawingml/2006/main" xmlns:r="http://schemas.openxmlformats.org/officeDocument/2006/relationships" xmlns:p="http://schemas.openxmlformats.org/presentationml/2006/main">
-  <p:cSld>
-    <p:spTree>
-      <p:nvGrpSpPr>
-        <p:cNvPr id="1" name=""/>
-        <p:cNvGrpSpPr/>
-        <p:nvPr/>
-      </p:nvGrpSpPr>
-      <p:grpSpPr>
-        <a:xfrm>
-          <a:off x="0" y="0"/>
-          <a:ext cx="0" cy="0"/>
-          <a:chOff x="0" y="0"/>
-          <a:chExt cx="0" cy="0"/>
-        </a:xfrm>
-      </p:grpSpPr>
-      <p:sp>
-        <p:nvSpPr>
-          <p:cNvPr id="75" name="PlaceHolder 1"/>
-          <p:cNvSpPr>
-            <a:spLocks noGrp="1"/>
-          </p:cNvSpPr>
-          <p:nvPr>
-            <p:ph type="title"/>
-          </p:nvPr>
-        </p:nvSpPr>
-        <p:spPr>
-          <a:xfrm>
-            <a:off x="504000" y="28440"/>
-            <a:ext cx="9070560" cy="1341000"/>
-          </a:xfrm>
-          <a:prstGeom prst="rect">
-            <a:avLst/>
-          </a:prstGeom>
-          <a:noFill/>
-          <a:ln w="0">
-            <a:noFill/>
-          </a:ln>
-        </p:spPr>
-        <p:txBody>
-          <a:bodyPr lIns="0" tIns="0" rIns="0" bIns="0" anchor="ctr">
-            <a:spAutoFit/>
-          </a:bodyPr>
-          <a:lstStyle/>
-          <a:p>
-            <a:pPr indent="0" defTabSz="914400">
-              <a:lnSpc>
-                <a:spcPct val="90000"/>
-              </a:lnSpc>
-              <a:spcBef>
-                <a:spcPts val="1191"/>
-              </a:spcBef>
-              <a:spcAft>
-                <a:spcPts val="992"/>
-              </a:spcAft>
-              <a:buNone/>
-              <a:tabLst>
-                <a:tab pos="0" algn="l"/>
-              </a:tabLst>
-            </a:pPr>
-            <a:r>
-              <a:rPr lang="ru-RU" sz="2800" b="1" u="none" strike="noStrike">
-                <a:solidFill>
-                  <a:srgbClr val="000000"/>
-                </a:solidFill>
-                <a:effectLst/>
-                <a:uFillTx/>
-                <a:latin typeface="Times New Roman"/>
-                <a:ea typeface="DejaVu Sans"/>
-              </a:rPr>
-              <a:t>Итоги и дальнейшие шаги </a:t>
-            </a:r>
-            <a:endParaRPr lang="ru-RU" sz="2800" b="0" u="none" strike="noStrike">
-              <a:solidFill>
-                <a:schemeClr val="dk1"/>
-              </a:solidFill>
-              <a:effectLst/>
-              <a:uFillTx/>
-              <a:latin typeface="Arial"/>
-            </a:endParaRPr>
-          </a:p>
-        </p:txBody>
-      </p:sp>
-      <p:sp>
-        <p:nvSpPr>
-          <p:cNvPr id="76" name="PlaceHolder 2"/>
-          <p:cNvSpPr>
-            <a:spLocks noGrp="1"/>
-          </p:cNvSpPr>
-          <p:nvPr>
-            <p:ph/>
-          </p:nvPr>
-        </p:nvSpPr>
-        <p:spPr>
-          <a:xfrm>
-            <a:off x="504000" y="1326600"/>
-            <a:ext cx="9070560" cy="3713040"/>
-          </a:xfrm>
-          <a:prstGeom prst="rect">
-            <a:avLst/>
-          </a:prstGeom>
-          <a:noFill/>
-          <a:ln w="0">
-            <a:noFill/>
-          </a:ln>
-        </p:spPr>
-        <p:txBody>
-          <a:bodyPr lIns="0" tIns="0" rIns="0" bIns="0" anchor="t">
-            <a:noAutofit/>
-          </a:bodyPr>
-          <a:lstStyle/>
-          <a:p>
-            <a:pPr marL="432000" indent="-324000" defTabSz="914400">
-              <a:lnSpc>
-                <a:spcPct val="100000"/>
-              </a:lnSpc>
-              <a:spcBef>
-                <a:spcPts val="1191"/>
-              </a:spcBef>
-              <a:spcAft>
-                <a:spcPts val="992"/>
-              </a:spcAft>
-              <a:buClr>
-                <a:srgbClr val="000000"/>
-              </a:buClr>
-              <a:buSzPct val="45000"/>
-              <a:buFont typeface="Wingdings" charset="2"/>
-              <a:buChar char=""/>
-            </a:pPr>
-            <a:r>
-              <a:rPr lang="ru-RU" sz="2000" b="0" u="none" strike="noStrike" dirty="0">
-                <a:solidFill>
-                  <a:srgbClr val="000000"/>
-                </a:solidFill>
-                <a:effectLst/>
-                <a:uFillTx/>
-                <a:latin typeface="Times New Roman"/>
-                <a:ea typeface="DejaVu Sans"/>
-              </a:rPr>
-              <a:t>Геймификация повышает мотивацию и вовлеченность</a:t>
-            </a:r>
-            <a:endParaRPr lang="ru-RU" sz="2000" b="0" u="none" strike="noStrike" dirty="0">
-              <a:solidFill>
-                <a:schemeClr val="dk1"/>
-              </a:solidFill>
-              <a:effectLst/>
-              <a:uFillTx/>
-              <a:latin typeface="Arial"/>
-            </a:endParaRPr>
-          </a:p>
-          <a:p>
-            <a:pPr marL="432000" indent="-324000" defTabSz="914400">
-              <a:lnSpc>
-                <a:spcPct val="100000"/>
-              </a:lnSpc>
-              <a:spcBef>
-                <a:spcPts val="1191"/>
-              </a:spcBef>
-              <a:spcAft>
-                <a:spcPts val="992"/>
-              </a:spcAft>
-              <a:buClr>
-                <a:srgbClr val="000000"/>
-              </a:buClr>
-              <a:buSzPct val="45000"/>
-              <a:buFont typeface="Wingdings" charset="2"/>
-              <a:buChar char=""/>
-            </a:pPr>
-            <a:r>
-              <a:rPr lang="ru-RU" sz="2000" b="0" u="none" strike="noStrike" dirty="0">
-                <a:solidFill>
-                  <a:srgbClr val="000000"/>
-                </a:solidFill>
-                <a:effectLst/>
-                <a:uFillTx/>
-                <a:latin typeface="Times New Roman"/>
-                <a:ea typeface="DejaVu Sans"/>
-              </a:rPr>
-              <a:t>Баланс между игрой и содержанием критически важен</a:t>
-            </a:r>
-            <a:endParaRPr lang="ru-RU" sz="2000" b="0" u="none" strike="noStrike" dirty="0">
-              <a:solidFill>
-                <a:schemeClr val="dk1"/>
-              </a:solidFill>
-              <a:effectLst/>
-              <a:uFillTx/>
-              <a:latin typeface="Arial"/>
-            </a:endParaRPr>
-          </a:p>
-          <a:p>
-            <a:pPr marL="432000" indent="-324000" defTabSz="914400">
-              <a:lnSpc>
-                <a:spcPct val="100000"/>
-              </a:lnSpc>
-              <a:spcBef>
-                <a:spcPts val="1191"/>
-              </a:spcBef>
-              <a:spcAft>
-                <a:spcPts val="992"/>
-              </a:spcAft>
-              <a:buClr>
-                <a:srgbClr val="000000"/>
-              </a:buClr>
-              <a:buSzPct val="45000"/>
-              <a:buFont typeface="Wingdings" charset="2"/>
-              <a:buChar char=""/>
-            </a:pPr>
-            <a:r>
-              <a:rPr lang="ru-RU" sz="2000" b="0" u="none" strike="noStrike" dirty="0">
-                <a:solidFill>
-                  <a:srgbClr val="000000"/>
-                </a:solidFill>
-                <a:effectLst/>
-                <a:uFillTx/>
-                <a:latin typeface="Times New Roman"/>
-                <a:ea typeface="DejaVu Sans"/>
-              </a:rPr>
-              <a:t>Проект имеет коммерческие перспективы</a:t>
-            </a:r>
-            <a:endParaRPr lang="ru-RU" sz="2000" b="0" u="none" strike="noStrike" dirty="0">
-              <a:solidFill>
-                <a:schemeClr val="dk1"/>
-              </a:solidFill>
-              <a:effectLst/>
-              <a:uFillTx/>
-              <a:latin typeface="Arial"/>
-            </a:endParaRPr>
-          </a:p>
-          <a:p>
-            <a:pPr marL="432000" indent="-324000" defTabSz="914400">
-              <a:lnSpc>
-                <a:spcPct val="100000"/>
-              </a:lnSpc>
-              <a:spcBef>
-                <a:spcPts val="1191"/>
-              </a:spcBef>
-              <a:spcAft>
-                <a:spcPts val="992"/>
-              </a:spcAft>
-              <a:buClr>
-                <a:srgbClr val="000000"/>
-              </a:buClr>
-              <a:buSzPct val="45000"/>
-              <a:buFont typeface="Wingdings" charset="2"/>
-              <a:buChar char=""/>
-            </a:pPr>
-            <a:r>
-              <a:rPr lang="ru-RU" sz="2000" b="0" u="none" strike="noStrike" dirty="0">
-                <a:solidFill>
-                  <a:srgbClr val="000000"/>
-                </a:solidFill>
-                <a:effectLst/>
-                <a:uFillTx/>
-                <a:latin typeface="Times New Roman"/>
-                <a:ea typeface="DejaVu Sans"/>
-              </a:rPr>
-              <a:t>Полученные навыки:</a:t>
-            </a:r>
-            <a:endParaRPr lang="ru-RU" sz="2000" b="0" u="none" strike="noStrike" dirty="0">
-              <a:solidFill>
-                <a:schemeClr val="dk1"/>
-              </a:solidFill>
-              <a:effectLst/>
-              <a:uFillTx/>
-              <a:latin typeface="Arial"/>
-            </a:endParaRPr>
-          </a:p>
-          <a:p>
-            <a:pPr marL="864000" lvl="1" indent="-324000" defTabSz="914400">
-              <a:lnSpc>
-                <a:spcPct val="100000"/>
-              </a:lnSpc>
-              <a:spcBef>
-                <a:spcPts val="1134"/>
-              </a:spcBef>
-              <a:buClr>
-                <a:srgbClr val="000000"/>
-              </a:buClr>
-              <a:buSzPct val="75000"/>
-              <a:buFont typeface="Symbol" charset="2"/>
-              <a:buChar char=""/>
-            </a:pPr>
-            <a:r>
-              <a:rPr lang="ru-RU" sz="2000" b="0" u="none" strike="noStrike" dirty="0">
-                <a:solidFill>
-                  <a:srgbClr val="000000"/>
-                </a:solidFill>
-                <a:effectLst/>
-                <a:uFillTx/>
-                <a:latin typeface="Times New Roman"/>
-                <a:ea typeface="DejaVu Sans"/>
-              </a:rPr>
-              <a:t>Научное исследование</a:t>
-            </a:r>
-            <a:endParaRPr lang="ru-RU" sz="2000" b="0" u="none" strike="noStrike" dirty="0">
-              <a:solidFill>
-                <a:schemeClr val="dk1"/>
-              </a:solidFill>
-              <a:effectLst/>
-              <a:uFillTx/>
-              <a:latin typeface="Arial"/>
-            </a:endParaRPr>
-          </a:p>
-          <a:p>
-            <a:pPr marL="864000" lvl="1" indent="-324000" defTabSz="914400">
-              <a:lnSpc>
-                <a:spcPct val="100000"/>
-              </a:lnSpc>
-              <a:spcBef>
-                <a:spcPts val="1134"/>
-              </a:spcBef>
-              <a:buClr>
-                <a:srgbClr val="000000"/>
-              </a:buClr>
-              <a:buSzPct val="75000"/>
-              <a:buFont typeface="Symbol" charset="2"/>
-              <a:buChar char=""/>
-            </a:pPr>
-            <a:r>
-              <a:rPr lang="ru-RU" sz="2000" b="0" u="none" strike="noStrike" dirty="0">
-                <a:solidFill>
-                  <a:srgbClr val="000000"/>
-                </a:solidFill>
-                <a:effectLst/>
-                <a:uFillTx/>
-                <a:latin typeface="Times New Roman"/>
-                <a:ea typeface="DejaVu Sans"/>
-              </a:rPr>
-              <a:t>Разработка ИС</a:t>
-            </a:r>
-            <a:endParaRPr lang="ru-RU" sz="2000" b="0" u="none" strike="noStrike" dirty="0">
-              <a:solidFill>
-                <a:schemeClr val="dk1"/>
-              </a:solidFill>
-              <a:effectLst/>
-              <a:uFillTx/>
-              <a:latin typeface="Arial"/>
-            </a:endParaRPr>
-          </a:p>
-          <a:p>
-            <a:pPr marL="864000" lvl="1" indent="-324000" defTabSz="914400">
-              <a:lnSpc>
-                <a:spcPct val="100000"/>
-              </a:lnSpc>
-              <a:spcBef>
-                <a:spcPts val="1134"/>
-              </a:spcBef>
-              <a:buClr>
-                <a:srgbClr val="000000"/>
-              </a:buClr>
-              <a:buSzPct val="75000"/>
-              <a:buFont typeface="Symbol" charset="2"/>
-              <a:buChar char=""/>
-            </a:pPr>
-            <a:r>
-              <a:rPr lang="ru-RU" sz="2000" b="0" u="none" strike="noStrike" dirty="0">
-                <a:solidFill>
-                  <a:srgbClr val="000000"/>
-                </a:solidFill>
-                <a:effectLst/>
-                <a:uFillTx/>
-                <a:latin typeface="Times New Roman"/>
-                <a:ea typeface="DejaVu Sans"/>
-              </a:rPr>
-              <a:t>Тестирование и аналитика</a:t>
-            </a:r>
-            <a:endParaRPr lang="ru-RU" sz="2000" b="0" u="none" strike="noStrike" dirty="0">
-              <a:solidFill>
-                <a:schemeClr val="dk1"/>
-              </a:solidFill>
-              <a:effectLst/>
-              <a:uFillTx/>
-              <a:latin typeface="Arial"/>
-            </a:endParaRPr>
-          </a:p>
-        </p:txBody>
-      </p:sp>
     </p:spTree>
   </p:cSld>
   <p:clrMapOvr>
